--- a/Basics.pptx
+++ b/Basics.pptx
@@ -199,7 +199,7 @@
           <a:p>
             <a:fld id="{0A3EA5A6-94B0-4166-9735-24E0CF1D3C18}" type="datetimeFigureOut">
               <a:rPr lang="es-MX" smtClean="0"/>
-              <a:t>19/06/2026</a:t>
+              <a:t>20/06/2026</a:t>
             </a:fld>
             <a:endParaRPr lang="es-MX"/>
           </a:p>
@@ -805,7 +805,7 @@
           <a:p>
             <a:fld id="{3A0B0DEB-6357-4AA7-B044-02FE390C03FA}" type="datetimeFigureOut">
               <a:rPr lang="es-MX" smtClean="0"/>
-              <a:t>19/06/2026</a:t>
+              <a:t>20/06/2026</a:t>
             </a:fld>
             <a:endParaRPr lang="es-MX"/>
           </a:p>
@@ -1003,7 +1003,7 @@
           <a:p>
             <a:fld id="{3A0B0DEB-6357-4AA7-B044-02FE390C03FA}" type="datetimeFigureOut">
               <a:rPr lang="es-MX" smtClean="0"/>
-              <a:t>19/06/2026</a:t>
+              <a:t>20/06/2026</a:t>
             </a:fld>
             <a:endParaRPr lang="es-MX"/>
           </a:p>
@@ -1211,7 +1211,7 @@
           <a:p>
             <a:fld id="{3A0B0DEB-6357-4AA7-B044-02FE390C03FA}" type="datetimeFigureOut">
               <a:rPr lang="es-MX" smtClean="0"/>
-              <a:t>19/06/2026</a:t>
+              <a:t>20/06/2026</a:t>
             </a:fld>
             <a:endParaRPr lang="es-MX"/>
           </a:p>
@@ -1409,7 +1409,7 @@
           <a:p>
             <a:fld id="{3A0B0DEB-6357-4AA7-B044-02FE390C03FA}" type="datetimeFigureOut">
               <a:rPr lang="es-MX" smtClean="0"/>
-              <a:t>19/06/2026</a:t>
+              <a:t>20/06/2026</a:t>
             </a:fld>
             <a:endParaRPr lang="es-MX"/>
           </a:p>
@@ -1684,7 +1684,7 @@
           <a:p>
             <a:fld id="{3A0B0DEB-6357-4AA7-B044-02FE390C03FA}" type="datetimeFigureOut">
               <a:rPr lang="es-MX" smtClean="0"/>
-              <a:t>19/06/2026</a:t>
+              <a:t>20/06/2026</a:t>
             </a:fld>
             <a:endParaRPr lang="es-MX"/>
           </a:p>
@@ -1949,7 +1949,7 @@
           <a:p>
             <a:fld id="{3A0B0DEB-6357-4AA7-B044-02FE390C03FA}" type="datetimeFigureOut">
               <a:rPr lang="es-MX" smtClean="0"/>
-              <a:t>19/06/2026</a:t>
+              <a:t>20/06/2026</a:t>
             </a:fld>
             <a:endParaRPr lang="es-MX"/>
           </a:p>
@@ -2361,7 +2361,7 @@
           <a:p>
             <a:fld id="{3A0B0DEB-6357-4AA7-B044-02FE390C03FA}" type="datetimeFigureOut">
               <a:rPr lang="es-MX" smtClean="0"/>
-              <a:t>19/06/2026</a:t>
+              <a:t>20/06/2026</a:t>
             </a:fld>
             <a:endParaRPr lang="es-MX"/>
           </a:p>
@@ -2502,7 +2502,7 @@
           <a:p>
             <a:fld id="{3A0B0DEB-6357-4AA7-B044-02FE390C03FA}" type="datetimeFigureOut">
               <a:rPr lang="es-MX" smtClean="0"/>
-              <a:t>19/06/2026</a:t>
+              <a:t>20/06/2026</a:t>
             </a:fld>
             <a:endParaRPr lang="es-MX"/>
           </a:p>
@@ -2615,7 +2615,7 @@
           <a:p>
             <a:fld id="{3A0B0DEB-6357-4AA7-B044-02FE390C03FA}" type="datetimeFigureOut">
               <a:rPr lang="es-MX" smtClean="0"/>
-              <a:t>19/06/2026</a:t>
+              <a:t>20/06/2026</a:t>
             </a:fld>
             <a:endParaRPr lang="es-MX"/>
           </a:p>
@@ -2926,7 +2926,7 @@
           <a:p>
             <a:fld id="{3A0B0DEB-6357-4AA7-B044-02FE390C03FA}" type="datetimeFigureOut">
               <a:rPr lang="es-MX" smtClean="0"/>
-              <a:t>19/06/2026</a:t>
+              <a:t>20/06/2026</a:t>
             </a:fld>
             <a:endParaRPr lang="es-MX"/>
           </a:p>
@@ -3214,7 +3214,7 @@
           <a:p>
             <a:fld id="{3A0B0DEB-6357-4AA7-B044-02FE390C03FA}" type="datetimeFigureOut">
               <a:rPr lang="es-MX" smtClean="0"/>
-              <a:t>19/06/2026</a:t>
+              <a:t>20/06/2026</a:t>
             </a:fld>
             <a:endParaRPr lang="es-MX"/>
           </a:p>
@@ -3455,7 +3455,7 @@
           <a:p>
             <a:fld id="{3A0B0DEB-6357-4AA7-B044-02FE390C03FA}" type="datetimeFigureOut">
               <a:rPr lang="es-MX" smtClean="0"/>
-              <a:t>19/06/2026</a:t>
+              <a:t>20/06/2026</a:t>
             </a:fld>
             <a:endParaRPr lang="es-MX"/>
           </a:p>
@@ -4443,7 +4443,7 @@
                 <a:ea typeface="Google Sans" pitchFamily="2" charset="0"/>
                 <a:cs typeface="Google Sans" pitchFamily="2" charset="0"/>
               </a:rPr>
-              <a:t>Is like the theoretical description of a species in a field guide. It dictates the characteristics and behaviors that this type of organism has. However, the description itself is not alive; it’s just a blueprint</a:t>
+              <a:t>It’s like the theoretical description of a species in a field guide. It dictates the characteristics and behaviors that this type of organism has. However, the description itself is not alive; it’s just a blueprint</a:t>
             </a:r>
           </a:p>
         </p:txBody>
